--- a/CartPole_results/RL_REINFORCE_PPO.pptx
+++ b/CartPole_results/RL_REINFORCE_PPO.pptx
@@ -14,6 +14,8 @@
     <p:sldId id="262" r:id="rId8"/>
     <p:sldId id="263" r:id="rId9"/>
     <p:sldId id="264" r:id="rId10"/>
+    <p:sldId id="265" r:id="rId11"/>
+    <p:sldId id="267" r:id="rId12"/>
   </p:sldIdLst>
   <p:sldSz cx="12192000" cy="6858000"/>
   <p:notesSz cx="6858000" cy="9144000"/>
@@ -267,7 +269,7 @@
           <a:p>
             <a:fld id="{930D45D7-259E-5A46-88E2-0DEC11727B8E}" type="datetimeFigureOut">
               <a:rPr lang="en-US" smtClean="0"/>
-              <a:t>8/27/26</a:t>
+              <a:t>9/1/26</a:t>
             </a:fld>
             <a:endParaRPr lang="en-US"/>
           </a:p>
@@ -465,7 +467,7 @@
           <a:p>
             <a:fld id="{930D45D7-259E-5A46-88E2-0DEC11727B8E}" type="datetimeFigureOut">
               <a:rPr lang="en-US" smtClean="0"/>
-              <a:t>8/27/26</a:t>
+              <a:t>9/1/26</a:t>
             </a:fld>
             <a:endParaRPr lang="en-US"/>
           </a:p>
@@ -673,7 +675,7 @@
           <a:p>
             <a:fld id="{930D45D7-259E-5A46-88E2-0DEC11727B8E}" type="datetimeFigureOut">
               <a:rPr lang="en-US" smtClean="0"/>
-              <a:t>8/27/26</a:t>
+              <a:t>9/1/26</a:t>
             </a:fld>
             <a:endParaRPr lang="en-US"/>
           </a:p>
@@ -871,7 +873,7 @@
           <a:p>
             <a:fld id="{930D45D7-259E-5A46-88E2-0DEC11727B8E}" type="datetimeFigureOut">
               <a:rPr lang="en-US" smtClean="0"/>
-              <a:t>8/27/26</a:t>
+              <a:t>9/1/26</a:t>
             </a:fld>
             <a:endParaRPr lang="en-US"/>
           </a:p>
@@ -1146,7 +1148,7 @@
           <a:p>
             <a:fld id="{930D45D7-259E-5A46-88E2-0DEC11727B8E}" type="datetimeFigureOut">
               <a:rPr lang="en-US" smtClean="0"/>
-              <a:t>8/27/26</a:t>
+              <a:t>9/1/26</a:t>
             </a:fld>
             <a:endParaRPr lang="en-US"/>
           </a:p>
@@ -1411,7 +1413,7 @@
           <a:p>
             <a:fld id="{930D45D7-259E-5A46-88E2-0DEC11727B8E}" type="datetimeFigureOut">
               <a:rPr lang="en-US" smtClean="0"/>
-              <a:t>8/27/26</a:t>
+              <a:t>9/1/26</a:t>
             </a:fld>
             <a:endParaRPr lang="en-US"/>
           </a:p>
@@ -1823,7 +1825,7 @@
           <a:p>
             <a:fld id="{930D45D7-259E-5A46-88E2-0DEC11727B8E}" type="datetimeFigureOut">
               <a:rPr lang="en-US" smtClean="0"/>
-              <a:t>8/27/26</a:t>
+              <a:t>9/1/26</a:t>
             </a:fld>
             <a:endParaRPr lang="en-US"/>
           </a:p>
@@ -1964,7 +1966,7 @@
           <a:p>
             <a:fld id="{930D45D7-259E-5A46-88E2-0DEC11727B8E}" type="datetimeFigureOut">
               <a:rPr lang="en-US" smtClean="0"/>
-              <a:t>8/27/26</a:t>
+              <a:t>9/1/26</a:t>
             </a:fld>
             <a:endParaRPr lang="en-US"/>
           </a:p>
@@ -2077,7 +2079,7 @@
           <a:p>
             <a:fld id="{930D45D7-259E-5A46-88E2-0DEC11727B8E}" type="datetimeFigureOut">
               <a:rPr lang="en-US" smtClean="0"/>
-              <a:t>8/27/26</a:t>
+              <a:t>9/1/26</a:t>
             </a:fld>
             <a:endParaRPr lang="en-US"/>
           </a:p>
@@ -2388,7 +2390,7 @@
           <a:p>
             <a:fld id="{930D45D7-259E-5A46-88E2-0DEC11727B8E}" type="datetimeFigureOut">
               <a:rPr lang="en-US" smtClean="0"/>
-              <a:t>8/27/26</a:t>
+              <a:t>9/1/26</a:t>
             </a:fld>
             <a:endParaRPr lang="en-US"/>
           </a:p>
@@ -2676,7 +2678,7 @@
           <a:p>
             <a:fld id="{930D45D7-259E-5A46-88E2-0DEC11727B8E}" type="datetimeFigureOut">
               <a:rPr lang="en-US" smtClean="0"/>
-              <a:t>8/27/26</a:t>
+              <a:t>9/1/26</a:t>
             </a:fld>
             <a:endParaRPr lang="en-US"/>
           </a:p>
@@ -2917,7 +2919,7 @@
           <a:p>
             <a:fld id="{930D45D7-259E-5A46-88E2-0DEC11727B8E}" type="datetimeFigureOut">
               <a:rPr lang="en-US" smtClean="0"/>
-              <a:t>8/27/26</a:t>
+              <a:t>9/1/26</a:t>
             </a:fld>
             <a:endParaRPr lang="en-US"/>
           </a:p>
@@ -3357,7 +3359,7 @@
           <a:p>
             <a:r>
               <a:rPr lang="en-US" dirty="0"/>
-              <a:t>Optical RL</a:t>
+              <a:t>RL: REINFORCE and PPO</a:t>
             </a:r>
           </a:p>
         </p:txBody>
@@ -3394,6 +3396,474 @@
     <p:extLst>
       <p:ext uri="{BB962C8B-B14F-4D97-AF65-F5344CB8AC3E}">
         <p14:creationId xmlns:p14="http://schemas.microsoft.com/office/powerpoint/2010/main" val="4002549768"/>
+      </p:ext>
+    </p:extLst>
+  </p:cSld>
+  <p:clrMapOvr>
+    <a:masterClrMapping/>
+  </p:clrMapOvr>
+</p:sld>
+</file>
+
+<file path=ppt/slides/slide10.xml><?xml version="1.0" encoding="utf-8"?>
+<p:sld xmlns:a="http://schemas.openxmlformats.org/drawingml/2006/main" xmlns:r="http://schemas.openxmlformats.org/officeDocument/2006/relationships" xmlns:p="http://schemas.openxmlformats.org/presentationml/2006/main">
+  <p:cSld>
+    <p:spTree>
+      <p:nvGrpSpPr>
+        <p:cNvPr id="1" name=""/>
+        <p:cNvGrpSpPr/>
+        <p:nvPr/>
+      </p:nvGrpSpPr>
+      <p:grpSpPr>
+        <a:xfrm>
+          <a:off x="0" y="0"/>
+          <a:ext cx="0" cy="0"/>
+          <a:chOff x="0" y="0"/>
+          <a:chExt cx="0" cy="0"/>
+        </a:xfrm>
+      </p:grpSpPr>
+      <p:sp>
+        <p:nvSpPr>
+          <p:cNvPr id="2" name="Title 1">
+            <a:extLst>
+              <a:ext uri="{FF2B5EF4-FFF2-40B4-BE49-F238E27FC236}">
+                <a16:creationId xmlns:a16="http://schemas.microsoft.com/office/drawing/2014/main" id="{89068D0C-86B5-D922-E161-F78A907BF052}"/>
+              </a:ext>
+            </a:extLst>
+          </p:cNvPr>
+          <p:cNvSpPr>
+            <a:spLocks noGrp="1"/>
+          </p:cNvSpPr>
+          <p:nvPr>
+            <p:ph type="title"/>
+          </p:nvPr>
+        </p:nvSpPr>
+        <p:spPr/>
+        <p:txBody>
+          <a:bodyPr/>
+          <a:lstStyle/>
+          <a:p>
+            <a:r>
+              <a:rPr lang="en-US" dirty="0"/>
+              <a:t>Step 2: learning state-dependent baseline</a:t>
+            </a:r>
+          </a:p>
+        </p:txBody>
+      </p:sp>
+      <p:pic>
+        <p:nvPicPr>
+          <p:cNvPr id="4" name="Picture 3">
+            <a:extLst>
+              <a:ext uri="{FF2B5EF4-FFF2-40B4-BE49-F238E27FC236}">
+                <a16:creationId xmlns:a16="http://schemas.microsoft.com/office/drawing/2014/main" id="{5E0E1C31-510E-C626-A328-7756F85F23CD}"/>
+              </a:ext>
+            </a:extLst>
+          </p:cNvPr>
+          <p:cNvPicPr>
+            <a:picLocks noChangeAspect="1"/>
+          </p:cNvPicPr>
+          <p:nvPr/>
+        </p:nvPicPr>
+        <p:blipFill>
+          <a:blip r:embed="rId2"/>
+          <a:stretch>
+            <a:fillRect/>
+          </a:stretch>
+        </p:blipFill>
+        <p:spPr>
+          <a:xfrm>
+            <a:off x="67123" y="1843874"/>
+            <a:ext cx="3186031" cy="3563395"/>
+          </a:xfrm>
+          <a:prstGeom prst="rect">
+            <a:avLst/>
+          </a:prstGeom>
+        </p:spPr>
+      </p:pic>
+      <p:pic>
+        <p:nvPicPr>
+          <p:cNvPr id="5" name="Picture 4">
+            <a:extLst>
+              <a:ext uri="{FF2B5EF4-FFF2-40B4-BE49-F238E27FC236}">
+                <a16:creationId xmlns:a16="http://schemas.microsoft.com/office/drawing/2014/main" id="{70194D57-E5D2-6657-83BF-31BD4FB9E15D}"/>
+              </a:ext>
+            </a:extLst>
+          </p:cNvPr>
+          <p:cNvPicPr>
+            <a:picLocks noChangeAspect="1"/>
+          </p:cNvPicPr>
+          <p:nvPr/>
+        </p:nvPicPr>
+        <p:blipFill>
+          <a:blip r:embed="rId3"/>
+          <a:stretch>
+            <a:fillRect/>
+          </a:stretch>
+        </p:blipFill>
+        <p:spPr>
+          <a:xfrm>
+            <a:off x="3825976" y="1843874"/>
+            <a:ext cx="3186031" cy="3584285"/>
+          </a:xfrm>
+          <a:prstGeom prst="rect">
+            <a:avLst/>
+          </a:prstGeom>
+        </p:spPr>
+      </p:pic>
+      <p:sp>
+        <p:nvSpPr>
+          <p:cNvPr id="6" name="TextBox 5">
+            <a:extLst>
+              <a:ext uri="{FF2B5EF4-FFF2-40B4-BE49-F238E27FC236}">
+                <a16:creationId xmlns:a16="http://schemas.microsoft.com/office/drawing/2014/main" id="{42B1BBBB-EDB4-9976-84D4-BFD26C0CAFF7}"/>
+              </a:ext>
+            </a:extLst>
+          </p:cNvPr>
+          <p:cNvSpPr txBox="1"/>
+          <p:nvPr/>
+        </p:nvSpPr>
+        <p:spPr>
+          <a:xfrm>
+            <a:off x="1019908" y="1538654"/>
+            <a:ext cx="1440523" cy="369332"/>
+          </a:xfrm>
+          <a:prstGeom prst="rect">
+            <a:avLst/>
+          </a:prstGeom>
+          <a:noFill/>
+        </p:spPr>
+        <p:txBody>
+          <a:bodyPr wrap="none" rtlCol="0">
+            <a:spAutoFit/>
+          </a:bodyPr>
+          <a:lstStyle/>
+          <a:p>
+            <a:r>
+              <a:rPr lang="en-US" dirty="0" err="1"/>
+              <a:t>nV_steps</a:t>
+            </a:r>
+            <a:r>
+              <a:rPr lang="en-US" dirty="0"/>
+              <a:t> = 1</a:t>
+            </a:r>
+          </a:p>
+        </p:txBody>
+      </p:sp>
+      <p:sp>
+        <p:nvSpPr>
+          <p:cNvPr id="7" name="TextBox 6">
+            <a:extLst>
+              <a:ext uri="{FF2B5EF4-FFF2-40B4-BE49-F238E27FC236}">
+                <a16:creationId xmlns:a16="http://schemas.microsoft.com/office/drawing/2014/main" id="{AA01B701-43C2-55DA-1DCF-CF2A12D731CB}"/>
+              </a:ext>
+            </a:extLst>
+          </p:cNvPr>
+          <p:cNvSpPr txBox="1"/>
+          <p:nvPr/>
+        </p:nvSpPr>
+        <p:spPr>
+          <a:xfrm>
+            <a:off x="4698729" y="1506022"/>
+            <a:ext cx="1563954" cy="369332"/>
+          </a:xfrm>
+          <a:prstGeom prst="rect">
+            <a:avLst/>
+          </a:prstGeom>
+          <a:noFill/>
+        </p:spPr>
+        <p:txBody>
+          <a:bodyPr wrap="none" rtlCol="0">
+            <a:spAutoFit/>
+          </a:bodyPr>
+          <a:lstStyle/>
+          <a:p>
+            <a:r>
+              <a:rPr lang="en-US" dirty="0" err="1"/>
+              <a:t>nV_steps</a:t>
+            </a:r>
+            <a:r>
+              <a:rPr lang="en-US" dirty="0"/>
+              <a:t> = 20</a:t>
+            </a:r>
+          </a:p>
+        </p:txBody>
+      </p:sp>
+      <p:sp>
+        <p:nvSpPr>
+          <p:cNvPr id="8" name="TextBox 7">
+            <a:extLst>
+              <a:ext uri="{FF2B5EF4-FFF2-40B4-BE49-F238E27FC236}">
+                <a16:creationId xmlns:a16="http://schemas.microsoft.com/office/drawing/2014/main" id="{2D748282-4AA4-5E80-B1E2-A2B9F228F02B}"/>
+              </a:ext>
+            </a:extLst>
+          </p:cNvPr>
+          <p:cNvSpPr txBox="1"/>
+          <p:nvPr/>
+        </p:nvSpPr>
+        <p:spPr>
+          <a:xfrm>
+            <a:off x="7584829" y="3059668"/>
+            <a:ext cx="1040670" cy="369332"/>
+          </a:xfrm>
+          <a:prstGeom prst="rect">
+            <a:avLst/>
+          </a:prstGeom>
+          <a:noFill/>
+        </p:spPr>
+        <p:txBody>
+          <a:bodyPr wrap="none" rtlCol="0">
+            <a:spAutoFit/>
+          </a:bodyPr>
+          <a:lstStyle/>
+          <a:p>
+            <a:r>
+              <a:rPr lang="en-US" dirty="0"/>
+              <a:t>Lr = 1e-2</a:t>
+            </a:r>
+          </a:p>
+        </p:txBody>
+      </p:sp>
+    </p:spTree>
+    <p:extLst>
+      <p:ext uri="{BB962C8B-B14F-4D97-AF65-F5344CB8AC3E}">
+        <p14:creationId xmlns:p14="http://schemas.microsoft.com/office/powerpoint/2010/main" val="2144458043"/>
+      </p:ext>
+    </p:extLst>
+  </p:cSld>
+  <p:clrMapOvr>
+    <a:masterClrMapping/>
+  </p:clrMapOvr>
+</p:sld>
+</file>
+
+<file path=ppt/slides/slide11.xml><?xml version="1.0" encoding="utf-8"?>
+<p:sld xmlns:a="http://schemas.openxmlformats.org/drawingml/2006/main" xmlns:r="http://schemas.openxmlformats.org/officeDocument/2006/relationships" xmlns:p="http://schemas.openxmlformats.org/presentationml/2006/main">
+  <p:cSld>
+    <p:spTree>
+      <p:nvGrpSpPr>
+        <p:cNvPr id="1" name="">
+          <a:extLst>
+            <a:ext uri="{FF2B5EF4-FFF2-40B4-BE49-F238E27FC236}">
+              <a16:creationId xmlns:a16="http://schemas.microsoft.com/office/drawing/2014/main" id="{DC7F0E83-102B-225B-5F3C-493DDA7EE103}"/>
+            </a:ext>
+          </a:extLst>
+        </p:cNvPr>
+        <p:cNvGrpSpPr/>
+        <p:nvPr/>
+      </p:nvGrpSpPr>
+      <p:grpSpPr>
+        <a:xfrm>
+          <a:off x="0" y="0"/>
+          <a:ext cx="0" cy="0"/>
+          <a:chOff x="0" y="0"/>
+          <a:chExt cx="0" cy="0"/>
+        </a:xfrm>
+      </p:grpSpPr>
+      <p:sp>
+        <p:nvSpPr>
+          <p:cNvPr id="2" name="Title 1">
+            <a:extLst>
+              <a:ext uri="{FF2B5EF4-FFF2-40B4-BE49-F238E27FC236}">
+                <a16:creationId xmlns:a16="http://schemas.microsoft.com/office/drawing/2014/main" id="{8B818647-9043-B2FD-79F8-F9C592200E62}"/>
+              </a:ext>
+            </a:extLst>
+          </p:cNvPr>
+          <p:cNvSpPr>
+            <a:spLocks noGrp="1"/>
+          </p:cNvSpPr>
+          <p:nvPr>
+            <p:ph type="title"/>
+          </p:nvPr>
+        </p:nvSpPr>
+        <p:spPr/>
+        <p:txBody>
+          <a:bodyPr/>
+          <a:lstStyle/>
+          <a:p>
+            <a:r>
+              <a:rPr lang="en-US" dirty="0"/>
+              <a:t>Step 2: learning state-dependent baseline</a:t>
+            </a:r>
+          </a:p>
+        </p:txBody>
+      </p:sp>
+      <p:sp>
+        <p:nvSpPr>
+          <p:cNvPr id="6" name="TextBox 5">
+            <a:extLst>
+              <a:ext uri="{FF2B5EF4-FFF2-40B4-BE49-F238E27FC236}">
+                <a16:creationId xmlns:a16="http://schemas.microsoft.com/office/drawing/2014/main" id="{6ED8B691-680D-3866-EA1E-931169F0186F}"/>
+              </a:ext>
+            </a:extLst>
+          </p:cNvPr>
+          <p:cNvSpPr txBox="1"/>
+          <p:nvPr/>
+        </p:nvSpPr>
+        <p:spPr>
+          <a:xfrm>
+            <a:off x="1019908" y="1538654"/>
+            <a:ext cx="1440523" cy="369332"/>
+          </a:xfrm>
+          <a:prstGeom prst="rect">
+            <a:avLst/>
+          </a:prstGeom>
+          <a:noFill/>
+        </p:spPr>
+        <p:txBody>
+          <a:bodyPr wrap="none" rtlCol="0">
+            <a:spAutoFit/>
+          </a:bodyPr>
+          <a:lstStyle/>
+          <a:p>
+            <a:r>
+              <a:rPr lang="en-US" dirty="0" err="1"/>
+              <a:t>nV_steps</a:t>
+            </a:r>
+            <a:r>
+              <a:rPr lang="en-US" dirty="0"/>
+              <a:t> = 1</a:t>
+            </a:r>
+          </a:p>
+        </p:txBody>
+      </p:sp>
+      <p:sp>
+        <p:nvSpPr>
+          <p:cNvPr id="7" name="TextBox 6">
+            <a:extLst>
+              <a:ext uri="{FF2B5EF4-FFF2-40B4-BE49-F238E27FC236}">
+                <a16:creationId xmlns:a16="http://schemas.microsoft.com/office/drawing/2014/main" id="{D573B125-5133-A060-F1AA-997DCB4164B4}"/>
+              </a:ext>
+            </a:extLst>
+          </p:cNvPr>
+          <p:cNvSpPr txBox="1"/>
+          <p:nvPr/>
+        </p:nvSpPr>
+        <p:spPr>
+          <a:xfrm>
+            <a:off x="4698729" y="1506022"/>
+            <a:ext cx="1563954" cy="369332"/>
+          </a:xfrm>
+          <a:prstGeom prst="rect">
+            <a:avLst/>
+          </a:prstGeom>
+          <a:noFill/>
+        </p:spPr>
+        <p:txBody>
+          <a:bodyPr wrap="none" rtlCol="0">
+            <a:spAutoFit/>
+          </a:bodyPr>
+          <a:lstStyle/>
+          <a:p>
+            <a:r>
+              <a:rPr lang="en-US" dirty="0" err="1"/>
+              <a:t>nV_steps</a:t>
+            </a:r>
+            <a:r>
+              <a:rPr lang="en-US" dirty="0"/>
+              <a:t> = 20</a:t>
+            </a:r>
+          </a:p>
+        </p:txBody>
+      </p:sp>
+      <p:sp>
+        <p:nvSpPr>
+          <p:cNvPr id="8" name="TextBox 7">
+            <a:extLst>
+              <a:ext uri="{FF2B5EF4-FFF2-40B4-BE49-F238E27FC236}">
+                <a16:creationId xmlns:a16="http://schemas.microsoft.com/office/drawing/2014/main" id="{8F03282E-6F76-BD65-0154-5AAD85846CDB}"/>
+              </a:ext>
+            </a:extLst>
+          </p:cNvPr>
+          <p:cNvSpPr txBox="1"/>
+          <p:nvPr/>
+        </p:nvSpPr>
+        <p:spPr>
+          <a:xfrm>
+            <a:off x="7584829" y="3059668"/>
+            <a:ext cx="1040670" cy="369332"/>
+          </a:xfrm>
+          <a:prstGeom prst="rect">
+            <a:avLst/>
+          </a:prstGeom>
+          <a:noFill/>
+        </p:spPr>
+        <p:txBody>
+          <a:bodyPr wrap="none" rtlCol="0">
+            <a:spAutoFit/>
+          </a:bodyPr>
+          <a:lstStyle/>
+          <a:p>
+            <a:r>
+              <a:rPr lang="en-US" dirty="0"/>
+              <a:t>Lr = 1e-3</a:t>
+            </a:r>
+          </a:p>
+        </p:txBody>
+      </p:sp>
+      <p:pic>
+        <p:nvPicPr>
+          <p:cNvPr id="3" name="Picture 2">
+            <a:extLst>
+              <a:ext uri="{FF2B5EF4-FFF2-40B4-BE49-F238E27FC236}">
+                <a16:creationId xmlns:a16="http://schemas.microsoft.com/office/drawing/2014/main" id="{1C236BDE-ED55-EF4F-3461-B7D1D003F9AF}"/>
+              </a:ext>
+            </a:extLst>
+          </p:cNvPr>
+          <p:cNvPicPr>
+            <a:picLocks noChangeAspect="1"/>
+          </p:cNvPicPr>
+          <p:nvPr/>
+        </p:nvPicPr>
+        <p:blipFill>
+          <a:blip r:embed="rId2"/>
+          <a:stretch>
+            <a:fillRect/>
+          </a:stretch>
+        </p:blipFill>
+        <p:spPr>
+          <a:xfrm>
+            <a:off x="113125" y="1993779"/>
+            <a:ext cx="3243630" cy="3609514"/>
+          </a:xfrm>
+          <a:prstGeom prst="rect">
+            <a:avLst/>
+          </a:prstGeom>
+        </p:spPr>
+      </p:pic>
+      <p:pic>
+        <p:nvPicPr>
+          <p:cNvPr id="9" name="Picture 8">
+            <a:extLst>
+              <a:ext uri="{FF2B5EF4-FFF2-40B4-BE49-F238E27FC236}">
+                <a16:creationId xmlns:a16="http://schemas.microsoft.com/office/drawing/2014/main" id="{5AE911B8-7479-1643-7313-4E9BA75AFE33}"/>
+              </a:ext>
+            </a:extLst>
+          </p:cNvPr>
+          <p:cNvPicPr>
+            <a:picLocks noChangeAspect="1"/>
+          </p:cNvPicPr>
+          <p:nvPr/>
+        </p:nvPicPr>
+        <p:blipFill>
+          <a:blip r:embed="rId3"/>
+          <a:stretch>
+            <a:fillRect/>
+          </a:stretch>
+        </p:blipFill>
+        <p:spPr>
+          <a:xfrm>
+            <a:off x="3856710" y="1993779"/>
+            <a:ext cx="3245669" cy="3609514"/>
+          </a:xfrm>
+          <a:prstGeom prst="rect">
+            <a:avLst/>
+          </a:prstGeom>
+        </p:spPr>
+      </p:pic>
+    </p:spTree>
+    <p:extLst>
+      <p:ext uri="{BB962C8B-B14F-4D97-AF65-F5344CB8AC3E}">
+        <p14:creationId xmlns:p14="http://schemas.microsoft.com/office/powerpoint/2010/main" val="392033469"/>
       </p:ext>
     </p:extLst>
   </p:cSld>
@@ -4560,7 +5030,7 @@
             </a:pPr>
             <a:r>
               <a:rPr lang="en-US" sz="2400" dirty="0"/>
-              <a:t>Value baseline (VPG) – actor-critic</a:t>
+              <a:t>Value baseline (VPG)</a:t>
             </a:r>
           </a:p>
           <a:p>
